--- a/set/2026-08-30 ECBC-CH.pptx
+++ b/set/2026-08-30 ECBC-CH.pptx
@@ -12,9 +12,9 @@
     <p:sldId id="284" r:id="rId3"/>
     <p:sldId id="276" r:id="rId4"/>
     <p:sldId id="285" r:id="rId5"/>
-    <p:sldId id="286" r:id="rId6"/>
+    <p:sldId id="312" r:id="rId6"/>
     <p:sldId id="287" r:id="rId7"/>
-    <p:sldId id="288" r:id="rId8"/>
+    <p:sldId id="313" r:id="rId8"/>
     <p:sldId id="261" r:id="rId9"/>
     <p:sldId id="275" r:id="rId10"/>
     <p:sldId id="265" r:id="rId11"/>
@@ -6660,7 +6660,7 @@
                 <a:latin typeface="Avenir Medium" panose="02000503020000020003" pitchFamily="2" charset="0"/>
                 <a:ea typeface="Bodoni Ornaments" pitchFamily="2" charset="0"/>
               </a:rPr>
-              <a:t> D                 A                             Em</a:t>
+              <a:t> G                 D                             Am</a:t>
             </a:r>
           </a:p>
           <a:p>
@@ -6686,7 +6686,7 @@
                 <a:latin typeface="Avenir Medium" panose="02000503020000020003" pitchFamily="2" charset="0"/>
                 <a:ea typeface="Bodoni Ornaments" pitchFamily="2" charset="0"/>
               </a:rPr>
-              <a:t>D                  A                G</a:t>
+              <a:t>G                  D                C</a:t>
             </a:r>
           </a:p>
           <a:p>
@@ -6712,7 +6712,7 @@
                 <a:latin typeface="Avenir Medium" panose="02000503020000020003" pitchFamily="2" charset="0"/>
                 <a:ea typeface="Bodoni Ornaments" pitchFamily="2" charset="0"/>
               </a:rPr>
-              <a:t>  D               A              Em</a:t>
+              <a:t>  G               D              Am</a:t>
             </a:r>
           </a:p>
           <a:p>
@@ -6738,7 +6738,7 @@
                 <a:latin typeface="Avenir Medium" panose="02000503020000020003" pitchFamily="2" charset="0"/>
                 <a:ea typeface="Bodoni Ornaments" pitchFamily="2" charset="0"/>
               </a:rPr>
-              <a:t>  D            A                     G         </a:t>
+              <a:t>  G            D                     C         </a:t>
             </a:r>
           </a:p>
           <a:p>
@@ -9470,7 +9470,7 @@
                 <a:latin typeface="Avenir Medium" panose="02000503020000020003" pitchFamily="2" charset="0"/>
                 <a:ea typeface="Bodoni Ornaments" pitchFamily="2" charset="0"/>
               </a:rPr>
-              <a:t>                     D                                 A </a:t>
+              <a:t>                     G                                 D </a:t>
             </a:r>
           </a:p>
           <a:p>
@@ -9496,7 +9496,7 @@
                 <a:latin typeface="Avenir Medium" panose="02000503020000020003" pitchFamily="2" charset="0"/>
                 <a:ea typeface="Bodoni Ornaments" pitchFamily="2" charset="0"/>
               </a:rPr>
-              <a:t>                     D                            G</a:t>
+              <a:t>                     G                            C</a:t>
             </a:r>
           </a:p>
           <a:p>
@@ -9522,33 +9522,33 @@
                 <a:latin typeface="Avenir Medium" panose="02000503020000020003" pitchFamily="2" charset="0"/>
                 <a:ea typeface="Bodoni Ornaments" pitchFamily="2" charset="0"/>
               </a:rPr>
-              <a:t>                                     D                          A</a:t>
-            </a:r>
-          </a:p>
-          <a:p>
-            <a:pPr algn="l"/>
-            <a:r>
-              <a:rPr lang="en-US" sz="3600" dirty="0">
-                <a:solidFill>
-                  <a:schemeClr val="bg1"/>
-                </a:solidFill>
-                <a:latin typeface="Avenir Medium" panose="02000503020000020003" pitchFamily="2" charset="0"/>
-                <a:ea typeface="Bodoni Ornaments" pitchFamily="2" charset="0"/>
-              </a:rPr>
-              <a:t>And you're altogether lovely Altogether worthy</a:t>
-            </a:r>
-          </a:p>
-          <a:p>
-            <a:pPr algn="l"/>
-            <a:r>
-              <a:rPr lang="en-US" sz="3600" dirty="0">
-                <a:solidFill>
-                  <a:srgbClr val="FFFF00"/>
-                </a:solidFill>
-                <a:latin typeface="Avenir Medium" panose="02000503020000020003" pitchFamily="2" charset="0"/>
-                <a:ea typeface="Bodoni Ornaments" pitchFamily="2" charset="0"/>
-              </a:rPr>
-              <a:t>                  D                    G</a:t>
+              <a:t>                              G                          D</a:t>
+            </a:r>
+          </a:p>
+          <a:p>
+            <a:pPr algn="l"/>
+            <a:r>
+              <a:rPr lang="en-US" sz="3600" dirty="0">
+                <a:solidFill>
+                  <a:schemeClr val="bg1"/>
+                </a:solidFill>
+                <a:latin typeface="Avenir Medium" panose="02000503020000020003" pitchFamily="2" charset="0"/>
+                <a:ea typeface="Bodoni Ornaments" pitchFamily="2" charset="0"/>
+              </a:rPr>
+              <a:t>You're altogether lovely Altogether worthy</a:t>
+            </a:r>
+          </a:p>
+          <a:p>
+            <a:pPr algn="l"/>
+            <a:r>
+              <a:rPr lang="en-US" sz="3600" dirty="0">
+                <a:solidFill>
+                  <a:srgbClr val="FFFF00"/>
+                </a:solidFill>
+                <a:latin typeface="Avenir Medium" panose="02000503020000020003" pitchFamily="2" charset="0"/>
+                <a:ea typeface="Bodoni Ornaments" pitchFamily="2" charset="0"/>
+              </a:rPr>
+              <a:t>                  G                    C</a:t>
             </a:r>
           </a:p>
           <a:p>
@@ -11924,7 +11924,7 @@
                 <a:latin typeface="Avenir Medium" panose="02000503020000020003" pitchFamily="2" charset="0"/>
                 <a:ea typeface="Bodoni Ornaments" pitchFamily="2" charset="0"/>
               </a:rPr>
-              <a:t>D               A                Em</a:t>
+              <a:t>G               D                Am</a:t>
             </a:r>
           </a:p>
           <a:p>
@@ -11950,7 +11950,7 @@
                 <a:latin typeface="Avenir Medium" panose="02000503020000020003" pitchFamily="2" charset="0"/>
                 <a:ea typeface="Bodoni Ornaments" pitchFamily="2" charset="0"/>
               </a:rPr>
-              <a:t> D               A          G</a:t>
+              <a:t> G               D          C</a:t>
             </a:r>
           </a:p>
           <a:p>
@@ -11976,7 +11976,7 @@
                 <a:latin typeface="Avenir Medium" panose="02000503020000020003" pitchFamily="2" charset="0"/>
                 <a:ea typeface="Bodoni Ornaments" pitchFamily="2" charset="0"/>
               </a:rPr>
-              <a:t> D                 A                 Em</a:t>
+              <a:t> G                 D                 Am</a:t>
             </a:r>
           </a:p>
           <a:p>
@@ -12002,7 +12002,7 @@
                 <a:latin typeface="Avenir Medium" panose="02000503020000020003" pitchFamily="2" charset="0"/>
                 <a:ea typeface="Bodoni Ornaments" pitchFamily="2" charset="0"/>
               </a:rPr>
-              <a:t> D       A                              G         </a:t>
+              <a:t> G       D                              C         </a:t>
             </a:r>
           </a:p>
           <a:p>
@@ -12230,7 +12230,7 @@
         <p:cNvPr id="1" name="">
           <a:extLst>
             <a:ext uri="{FF2B5EF4-FFF2-40B4-BE49-F238E27FC236}">
-              <a16:creationId xmlns:a16="http://schemas.microsoft.com/office/drawing/2014/main" id="{CB643E6E-9210-0D93-C0AE-7D3F3C85EAE6}"/>
+              <a16:creationId xmlns:a16="http://schemas.microsoft.com/office/drawing/2014/main" id="{E719D002-FCA0-246E-16BA-0F489AE9E812}"/>
             </a:ext>
           </a:extLst>
         </p:cNvPr>
@@ -12250,7 +12250,7 @@
           <p:cNvPr id="3" name="Subtitle 2">
             <a:extLst>
               <a:ext uri="{FF2B5EF4-FFF2-40B4-BE49-F238E27FC236}">
-                <a16:creationId xmlns:a16="http://schemas.microsoft.com/office/drawing/2014/main" id="{3166FAC4-1AE5-F2B7-96B1-2BC84CCC2096}"/>
+                <a16:creationId xmlns:a16="http://schemas.microsoft.com/office/drawing/2014/main" id="{DF3BB9B5-6CA9-7169-DD30-3082D279EC2B}"/>
               </a:ext>
             </a:extLst>
           </p:cNvPr>
@@ -12263,8 +12263,8 @@
         </p:nvSpPr>
         <p:spPr>
           <a:xfrm>
-            <a:off x="222739" y="211015"/>
-            <a:ext cx="10472156" cy="6482862"/>
+            <a:off x="222738" y="211015"/>
+            <a:ext cx="11699631" cy="6482862"/>
           </a:xfrm>
         </p:spPr>
         <p:txBody>
@@ -12295,7 +12295,7 @@
                 <a:latin typeface="Avenir Medium" panose="02000503020000020003" pitchFamily="2" charset="0"/>
                 <a:ea typeface="Bodoni Ornaments" pitchFamily="2" charset="0"/>
               </a:rPr>
-              <a:t>                     D                                 A </a:t>
+              <a:t>                     G                                 D </a:t>
             </a:r>
           </a:p>
           <a:p>
@@ -12321,7 +12321,7 @@
                 <a:latin typeface="Avenir Medium" panose="02000503020000020003" pitchFamily="2" charset="0"/>
                 <a:ea typeface="Bodoni Ornaments" pitchFamily="2" charset="0"/>
               </a:rPr>
-              <a:t>                     D                            G</a:t>
+              <a:t>                     G                            C</a:t>
             </a:r>
           </a:p>
           <a:p>
@@ -12347,33 +12347,33 @@
                 <a:latin typeface="Avenir Medium" panose="02000503020000020003" pitchFamily="2" charset="0"/>
                 <a:ea typeface="Bodoni Ornaments" pitchFamily="2" charset="0"/>
               </a:rPr>
-              <a:t>                                     D                          A</a:t>
-            </a:r>
-          </a:p>
-          <a:p>
-            <a:pPr algn="l"/>
-            <a:r>
-              <a:rPr lang="en-US" sz="3600" dirty="0">
-                <a:solidFill>
-                  <a:schemeClr val="bg1"/>
-                </a:solidFill>
-                <a:latin typeface="Avenir Medium" panose="02000503020000020003" pitchFamily="2" charset="0"/>
-                <a:ea typeface="Bodoni Ornaments" pitchFamily="2" charset="0"/>
-              </a:rPr>
-              <a:t>And you're altogether lovely Altogether worthy</a:t>
-            </a:r>
-          </a:p>
-          <a:p>
-            <a:pPr algn="l"/>
-            <a:r>
-              <a:rPr lang="en-US" sz="3600" dirty="0">
-                <a:solidFill>
-                  <a:srgbClr val="FFFF00"/>
-                </a:solidFill>
-                <a:latin typeface="Avenir Medium" panose="02000503020000020003" pitchFamily="2" charset="0"/>
-                <a:ea typeface="Bodoni Ornaments" pitchFamily="2" charset="0"/>
-              </a:rPr>
-              <a:t>                  D                    G</a:t>
+              <a:t>                              G                          D</a:t>
+            </a:r>
+          </a:p>
+          <a:p>
+            <a:pPr algn="l"/>
+            <a:r>
+              <a:rPr lang="en-US" sz="3600" dirty="0">
+                <a:solidFill>
+                  <a:schemeClr val="bg1"/>
+                </a:solidFill>
+                <a:latin typeface="Avenir Medium" panose="02000503020000020003" pitchFamily="2" charset="0"/>
+                <a:ea typeface="Bodoni Ornaments" pitchFamily="2" charset="0"/>
+              </a:rPr>
+              <a:t>You're altogether lovely Altogether worthy</a:t>
+            </a:r>
+          </a:p>
+          <a:p>
+            <a:pPr algn="l"/>
+            <a:r>
+              <a:rPr lang="en-US" sz="3600" dirty="0">
+                <a:solidFill>
+                  <a:srgbClr val="FFFF00"/>
+                </a:solidFill>
+                <a:latin typeface="Avenir Medium" panose="02000503020000020003" pitchFamily="2" charset="0"/>
+                <a:ea typeface="Bodoni Ornaments" pitchFamily="2" charset="0"/>
+              </a:rPr>
+              <a:t>                  G                    C</a:t>
             </a:r>
           </a:p>
           <a:p>
@@ -12396,7 +12396,7 @@
           <p:cNvPr id="2" name="TextBox 1">
             <a:extLst>
               <a:ext uri="{FF2B5EF4-FFF2-40B4-BE49-F238E27FC236}">
-                <a16:creationId xmlns:a16="http://schemas.microsoft.com/office/drawing/2014/main" id="{037A157C-0723-604D-B3D7-90E7CFB1BDAC}"/>
+                <a16:creationId xmlns:a16="http://schemas.microsoft.com/office/drawing/2014/main" id="{D731883E-42A4-5C3C-8C92-7247B4DFB3FD}"/>
               </a:ext>
             </a:extLst>
           </p:cNvPr>
@@ -12419,11 +12419,37 @@
           </a:bodyPr>
           <a:lstStyle/>
           <a:p>
-            <a:r>
-              <a:rPr lang="en-US" sz="3600" b="1" dirty="0">
-                <a:solidFill>
-                  <a:schemeClr val="bg1"/>
-                </a:solidFill>
+            <a:pPr marL="0" marR="0" lvl="0" indent="0" algn="l" defTabSz="914400" rtl="0" eaLnBrk="1" fontAlgn="auto" latinLnBrk="0" hangingPunct="1">
+              <a:lnSpc>
+                <a:spcPct val="100000"/>
+              </a:lnSpc>
+              <a:spcBef>
+                <a:spcPts val="0"/>
+              </a:spcBef>
+              <a:spcAft>
+                <a:spcPts val="0"/>
+              </a:spcAft>
+              <a:buClrTx/>
+              <a:buSzTx/>
+              <a:buFontTx/>
+              <a:buNone/>
+              <a:tabLst/>
+              <a:defRPr/>
+            </a:pPr>
+            <a:r>
+              <a:rPr kumimoji="0" lang="en-US" sz="3600" b="1" i="0" u="none" strike="noStrike" kern="1200" cap="none" spc="0" normalizeH="0" baseline="0" noProof="0" dirty="0">
+                <a:ln>
+                  <a:noFill/>
+                </a:ln>
+                <a:solidFill>
+                  <a:prstClr val="white"/>
+                </a:solidFill>
+                <a:effectLst/>
+                <a:uLnTx/>
+                <a:uFillTx/>
+                <a:latin typeface="Aptos" panose="02110004020202020204"/>
+                <a:ea typeface="+mn-ea"/>
+                <a:cs typeface="+mn-cs"/>
               </a:rPr>
               <a:t>x2 to Bridge</a:t>
             </a:r>
@@ -12433,7 +12459,7 @@
     </p:spTree>
     <p:extLst>
       <p:ext uri="{BB962C8B-B14F-4D97-AF65-F5344CB8AC3E}">
-        <p14:creationId xmlns:p14="http://schemas.microsoft.com/office/powerpoint/2010/main" val="221088540"/>
+        <p14:creationId xmlns:p14="http://schemas.microsoft.com/office/powerpoint/2010/main" val="3064515698"/>
       </p:ext>
     </p:extLst>
   </p:cSld>
@@ -12534,7 +12560,7 @@
                 <a:latin typeface="Avenir Medium" panose="02000503020000020003" pitchFamily="2" charset="0"/>
                 <a:ea typeface="Bodoni Ornaments" pitchFamily="2" charset="0"/>
               </a:rPr>
-              <a:t>     A       D               G</a:t>
+              <a:t>     D       G               C</a:t>
             </a:r>
           </a:p>
           <a:p>
@@ -12560,8 +12586,25 @@
                 <a:latin typeface="Avenir Medium" panose="02000503020000020003" pitchFamily="2" charset="0"/>
                 <a:ea typeface="Bodoni Ornaments" pitchFamily="2" charset="0"/>
               </a:rPr>
-              <a:t>     A         D   G</a:t>
-            </a:r>
+              <a:t>     D         </a:t>
+            </a:r>
+            <a:r>
+              <a:rPr lang="en-US" sz="3600">
+                <a:solidFill>
+                  <a:srgbClr val="FFFF00"/>
+                </a:solidFill>
+                <a:latin typeface="Avenir Medium" panose="02000503020000020003" pitchFamily="2" charset="0"/>
+                <a:ea typeface="Bodoni Ornaments" pitchFamily="2" charset="0"/>
+              </a:rPr>
+              <a:t>G             C</a:t>
+            </a:r>
+            <a:endParaRPr lang="en-US" sz="3600" dirty="0">
+              <a:solidFill>
+                <a:srgbClr val="FFFF00"/>
+              </a:solidFill>
+              <a:latin typeface="Avenir Medium" panose="02000503020000020003" pitchFamily="2" charset="0"/>
+              <a:ea typeface="Bodoni Ornaments" pitchFamily="2" charset="0"/>
+            </a:endParaRPr>
           </a:p>
           <a:p>
             <a:pPr algn="l"/>
@@ -12606,11 +12649,37 @@
           </a:bodyPr>
           <a:lstStyle/>
           <a:p>
-            <a:r>
-              <a:rPr lang="en-US" sz="3600" b="1" dirty="0">
-                <a:solidFill>
-                  <a:schemeClr val="bg1"/>
-                </a:solidFill>
+            <a:pPr marL="0" marR="0" lvl="0" indent="0" algn="l" defTabSz="914400" rtl="0" eaLnBrk="1" fontAlgn="auto" latinLnBrk="0" hangingPunct="1">
+              <a:lnSpc>
+                <a:spcPct val="100000"/>
+              </a:lnSpc>
+              <a:spcBef>
+                <a:spcPts val="0"/>
+              </a:spcBef>
+              <a:spcAft>
+                <a:spcPts val="0"/>
+              </a:spcAft>
+              <a:buClrTx/>
+              <a:buSzTx/>
+              <a:buFontTx/>
+              <a:buNone/>
+              <a:tabLst/>
+              <a:defRPr/>
+            </a:pPr>
+            <a:r>
+              <a:rPr kumimoji="0" lang="en-US" sz="3600" b="1" i="0" u="none" strike="noStrike" kern="1200" cap="none" spc="0" normalizeH="0" baseline="0" noProof="0" dirty="0">
+                <a:ln>
+                  <a:noFill/>
+                </a:ln>
+                <a:solidFill>
+                  <a:prstClr val="white"/>
+                </a:solidFill>
+                <a:effectLst/>
+                <a:uLnTx/>
+                <a:uFillTx/>
+                <a:latin typeface="Aptos" panose="02110004020202020204"/>
+                <a:ea typeface="+mn-ea"/>
+                <a:cs typeface="+mn-cs"/>
               </a:rPr>
               <a:t>x3 to Chorus</a:t>
             </a:r>
@@ -12648,7 +12717,7 @@
         <p:cNvPr id="1" name="">
           <a:extLst>
             <a:ext uri="{FF2B5EF4-FFF2-40B4-BE49-F238E27FC236}">
-              <a16:creationId xmlns:a16="http://schemas.microsoft.com/office/drawing/2014/main" id="{7DB329BF-095B-FA28-3FA8-950372EE1EF0}"/>
+              <a16:creationId xmlns:a16="http://schemas.microsoft.com/office/drawing/2014/main" id="{DDAB0709-CB67-06EF-FC21-14AED60C21AF}"/>
             </a:ext>
           </a:extLst>
         </p:cNvPr>
@@ -12668,7 +12737,7 @@
           <p:cNvPr id="3" name="Subtitle 2">
             <a:extLst>
               <a:ext uri="{FF2B5EF4-FFF2-40B4-BE49-F238E27FC236}">
-                <a16:creationId xmlns:a16="http://schemas.microsoft.com/office/drawing/2014/main" id="{BE2F92EA-9364-DF1F-A992-6778DFAF7F59}"/>
+                <a16:creationId xmlns:a16="http://schemas.microsoft.com/office/drawing/2014/main" id="{FA493994-0B02-2A10-3B3A-17F17953993C}"/>
               </a:ext>
             </a:extLst>
           </p:cNvPr>
@@ -12713,7 +12782,7 @@
                 <a:latin typeface="Avenir Medium" panose="02000503020000020003" pitchFamily="2" charset="0"/>
                 <a:ea typeface="Bodoni Ornaments" pitchFamily="2" charset="0"/>
               </a:rPr>
-              <a:t>                     D                                 A </a:t>
+              <a:t>                     G                                 D </a:t>
             </a:r>
           </a:p>
           <a:p>
@@ -12739,7 +12808,7 @@
                 <a:latin typeface="Avenir Medium" panose="02000503020000020003" pitchFamily="2" charset="0"/>
                 <a:ea typeface="Bodoni Ornaments" pitchFamily="2" charset="0"/>
               </a:rPr>
-              <a:t>                     D                            G</a:t>
+              <a:t>                     G                            C</a:t>
             </a:r>
           </a:p>
           <a:p>
@@ -12765,33 +12834,33 @@
                 <a:latin typeface="Avenir Medium" panose="02000503020000020003" pitchFamily="2" charset="0"/>
                 <a:ea typeface="Bodoni Ornaments" pitchFamily="2" charset="0"/>
               </a:rPr>
-              <a:t>                                     D                          A</a:t>
-            </a:r>
-          </a:p>
-          <a:p>
-            <a:pPr algn="l"/>
-            <a:r>
-              <a:rPr lang="en-US" sz="3600" dirty="0">
-                <a:solidFill>
-                  <a:schemeClr val="bg1"/>
-                </a:solidFill>
-                <a:latin typeface="Avenir Medium" panose="02000503020000020003" pitchFamily="2" charset="0"/>
-                <a:ea typeface="Bodoni Ornaments" pitchFamily="2" charset="0"/>
-              </a:rPr>
-              <a:t>And you're altogether lovely Altogether worthy</a:t>
-            </a:r>
-          </a:p>
-          <a:p>
-            <a:pPr algn="l"/>
-            <a:r>
-              <a:rPr lang="en-US" sz="3600" dirty="0">
-                <a:solidFill>
-                  <a:srgbClr val="FFFF00"/>
-                </a:solidFill>
-                <a:latin typeface="Avenir Medium" panose="02000503020000020003" pitchFamily="2" charset="0"/>
-                <a:ea typeface="Bodoni Ornaments" pitchFamily="2" charset="0"/>
-              </a:rPr>
-              <a:t>                  D                    G</a:t>
+              <a:t>                              G                          D</a:t>
+            </a:r>
+          </a:p>
+          <a:p>
+            <a:pPr algn="l"/>
+            <a:r>
+              <a:rPr lang="en-US" sz="3600" dirty="0">
+                <a:solidFill>
+                  <a:schemeClr val="bg1"/>
+                </a:solidFill>
+                <a:latin typeface="Avenir Medium" panose="02000503020000020003" pitchFamily="2" charset="0"/>
+                <a:ea typeface="Bodoni Ornaments" pitchFamily="2" charset="0"/>
+              </a:rPr>
+              <a:t>You're altogether lovely Altogether worthy</a:t>
+            </a:r>
+          </a:p>
+          <a:p>
+            <a:pPr algn="l"/>
+            <a:r>
+              <a:rPr lang="en-US" sz="3600" dirty="0">
+                <a:solidFill>
+                  <a:srgbClr val="FFFF00"/>
+                </a:solidFill>
+                <a:latin typeface="Avenir Medium" panose="02000503020000020003" pitchFamily="2" charset="0"/>
+                <a:ea typeface="Bodoni Ornaments" pitchFamily="2" charset="0"/>
+              </a:rPr>
+              <a:t>                  G                    C</a:t>
             </a:r>
           </a:p>
           <a:p>
@@ -12814,7 +12883,7 @@
           <p:cNvPr id="2" name="TextBox 1">
             <a:extLst>
               <a:ext uri="{FF2B5EF4-FFF2-40B4-BE49-F238E27FC236}">
-                <a16:creationId xmlns:a16="http://schemas.microsoft.com/office/drawing/2014/main" id="{930615E7-26A6-C468-7770-431E82D55DFC}"/>
+                <a16:creationId xmlns:a16="http://schemas.microsoft.com/office/drawing/2014/main" id="{0C1BCB16-F4E1-DD0C-F68F-C329E7FFFC3A}"/>
               </a:ext>
             </a:extLst>
           </p:cNvPr>
@@ -12823,8 +12892,8 @@
         </p:nvSpPr>
         <p:spPr>
           <a:xfrm>
-            <a:off x="9475694" y="6211669"/>
-            <a:ext cx="2568332" cy="646331"/>
+            <a:off x="9532169" y="6211669"/>
+            <a:ext cx="2078774" cy="646331"/>
           </a:xfrm>
           <a:prstGeom prst="rect">
             <a:avLst/>
@@ -12837,13 +12906,39 @@
           </a:bodyPr>
           <a:lstStyle/>
           <a:p>
-            <a:r>
-              <a:rPr lang="en-US" sz="3600" b="1" dirty="0">
-                <a:solidFill>
-                  <a:schemeClr val="bg1"/>
-                </a:solidFill>
-              </a:rPr>
-              <a:t>x2 and END</a:t>
+            <a:pPr marL="0" marR="0" lvl="0" indent="0" algn="l" defTabSz="914400" rtl="0" eaLnBrk="1" fontAlgn="auto" latinLnBrk="0" hangingPunct="1">
+              <a:lnSpc>
+                <a:spcPct val="100000"/>
+              </a:lnSpc>
+              <a:spcBef>
+                <a:spcPts val="0"/>
+              </a:spcBef>
+              <a:spcAft>
+                <a:spcPts val="0"/>
+              </a:spcAft>
+              <a:buClrTx/>
+              <a:buSzTx/>
+              <a:buFontTx/>
+              <a:buNone/>
+              <a:tabLst/>
+              <a:defRPr/>
+            </a:pPr>
+            <a:r>
+              <a:rPr kumimoji="0" lang="en-US" sz="3600" b="1" i="0" u="none" strike="noStrike" kern="1200" cap="none" spc="0" normalizeH="0" baseline="0" noProof="0" dirty="0">
+                <a:ln>
+                  <a:noFill/>
+                </a:ln>
+                <a:solidFill>
+                  <a:prstClr val="white"/>
+                </a:solidFill>
+                <a:effectLst/>
+                <a:uLnTx/>
+                <a:uFillTx/>
+                <a:latin typeface="Aptos" panose="02110004020202020204"/>
+                <a:ea typeface="+mn-ea"/>
+                <a:cs typeface="+mn-cs"/>
+              </a:rPr>
+              <a:t>x2 to End</a:t>
             </a:r>
           </a:p>
         </p:txBody>
@@ -12851,7 +12946,7 @@
     </p:spTree>
     <p:extLst>
       <p:ext uri="{BB962C8B-B14F-4D97-AF65-F5344CB8AC3E}">
-        <p14:creationId xmlns:p14="http://schemas.microsoft.com/office/powerpoint/2010/main" val="1511960292"/>
+        <p14:creationId xmlns:p14="http://schemas.microsoft.com/office/powerpoint/2010/main" val="779846196"/>
       </p:ext>
     </p:extLst>
   </p:cSld>

--- a/set/2026-08-30 ECBC-CH.pptx
+++ b/set/2026-08-30 ECBC-CH.pptx
@@ -236,7 +236,7 @@
           <a:p>
             <a:fld id="{1496D8E7-EBC1-9243-BEE6-902440DA0A3D}" type="datetimeFigureOut">
               <a:rPr lang="en-US" smtClean="0"/>
-              <a:t>8/29/26</a:t>
+              <a:t>8/30/26</a:t>
             </a:fld>
             <a:endParaRPr lang="en-US"/>
           </a:p>
@@ -650,7 +650,7 @@
           <a:p>
             <a:fld id="{E759A0DE-F190-5444-87AC-4719D5F20D15}" type="datetimeFigureOut">
               <a:rPr lang="en-US" smtClean="0"/>
-              <a:t>8/29/26</a:t>
+              <a:t>8/30/26</a:t>
             </a:fld>
             <a:endParaRPr lang="en-US"/>
           </a:p>
@@ -848,7 +848,7 @@
           <a:p>
             <a:fld id="{E759A0DE-F190-5444-87AC-4719D5F20D15}" type="datetimeFigureOut">
               <a:rPr lang="en-US" smtClean="0"/>
-              <a:t>8/29/26</a:t>
+              <a:t>8/30/26</a:t>
             </a:fld>
             <a:endParaRPr lang="en-US"/>
           </a:p>
@@ -1056,7 +1056,7 @@
           <a:p>
             <a:fld id="{E759A0DE-F190-5444-87AC-4719D5F20D15}" type="datetimeFigureOut">
               <a:rPr lang="en-US" smtClean="0"/>
-              <a:t>8/29/26</a:t>
+              <a:t>8/30/26</a:t>
             </a:fld>
             <a:endParaRPr lang="en-US"/>
           </a:p>
@@ -1254,7 +1254,7 @@
           <a:p>
             <a:fld id="{E759A0DE-F190-5444-87AC-4719D5F20D15}" type="datetimeFigureOut">
               <a:rPr lang="en-US" smtClean="0"/>
-              <a:t>8/29/26</a:t>
+              <a:t>8/30/26</a:t>
             </a:fld>
             <a:endParaRPr lang="en-US"/>
           </a:p>
@@ -1529,7 +1529,7 @@
           <a:p>
             <a:fld id="{E759A0DE-F190-5444-87AC-4719D5F20D15}" type="datetimeFigureOut">
               <a:rPr lang="en-US" smtClean="0"/>
-              <a:t>8/29/26</a:t>
+              <a:t>8/30/26</a:t>
             </a:fld>
             <a:endParaRPr lang="en-US"/>
           </a:p>
@@ -1794,7 +1794,7 @@
           <a:p>
             <a:fld id="{E759A0DE-F190-5444-87AC-4719D5F20D15}" type="datetimeFigureOut">
               <a:rPr lang="en-US" smtClean="0"/>
-              <a:t>8/29/26</a:t>
+              <a:t>8/30/26</a:t>
             </a:fld>
             <a:endParaRPr lang="en-US"/>
           </a:p>
@@ -2206,7 +2206,7 @@
           <a:p>
             <a:fld id="{E759A0DE-F190-5444-87AC-4719D5F20D15}" type="datetimeFigureOut">
               <a:rPr lang="en-US" smtClean="0"/>
-              <a:t>8/29/26</a:t>
+              <a:t>8/30/26</a:t>
             </a:fld>
             <a:endParaRPr lang="en-US"/>
           </a:p>
@@ -2347,7 +2347,7 @@
           <a:p>
             <a:fld id="{E759A0DE-F190-5444-87AC-4719D5F20D15}" type="datetimeFigureOut">
               <a:rPr lang="en-US" smtClean="0"/>
-              <a:t>8/29/26</a:t>
+              <a:t>8/30/26</a:t>
             </a:fld>
             <a:endParaRPr lang="en-US"/>
           </a:p>
@@ -2460,7 +2460,7 @@
           <a:p>
             <a:fld id="{E759A0DE-F190-5444-87AC-4719D5F20D15}" type="datetimeFigureOut">
               <a:rPr lang="en-US" smtClean="0"/>
-              <a:t>8/29/26</a:t>
+              <a:t>8/30/26</a:t>
             </a:fld>
             <a:endParaRPr lang="en-US"/>
           </a:p>
@@ -2771,7 +2771,7 @@
           <a:p>
             <a:fld id="{E759A0DE-F190-5444-87AC-4719D5F20D15}" type="datetimeFigureOut">
               <a:rPr lang="en-US" smtClean="0"/>
-              <a:t>8/29/26</a:t>
+              <a:t>8/30/26</a:t>
             </a:fld>
             <a:endParaRPr lang="en-US"/>
           </a:p>
@@ -3059,7 +3059,7 @@
           <a:p>
             <a:fld id="{E759A0DE-F190-5444-87AC-4719D5F20D15}" type="datetimeFigureOut">
               <a:rPr lang="en-US" smtClean="0"/>
-              <a:t>8/29/26</a:t>
+              <a:t>8/30/26</a:t>
             </a:fld>
             <a:endParaRPr lang="en-US"/>
           </a:p>
@@ -3300,7 +3300,7 @@
           <a:p>
             <a:fld id="{E759A0DE-F190-5444-87AC-4719D5F20D15}" type="datetimeFigureOut">
               <a:rPr lang="en-US" smtClean="0"/>
-              <a:t>8/29/26</a:t>
+              <a:t>8/30/26</a:t>
             </a:fld>
             <a:endParaRPr lang="en-US"/>
           </a:p>
@@ -5072,7 +5072,7 @@
         <p:spPr>
           <a:xfrm>
             <a:off x="682831" y="497702"/>
-            <a:ext cx="10826338" cy="5862596"/>
+            <a:ext cx="8849476" cy="5862596"/>
           </a:xfrm>
         </p:spPr>
         <p:txBody>
@@ -5218,6 +5218,45 @@
                 <a:ea typeface="Bodoni Ornaments" pitchFamily="2" charset="0"/>
               </a:rPr>
               <a:t>I will sing of the goodness of God</a:t>
+            </a:r>
+          </a:p>
+        </p:txBody>
+      </p:sp>
+      <p:sp>
+        <p:nvSpPr>
+          <p:cNvPr id="2" name="TextBox 1">
+            <a:extLst>
+              <a:ext uri="{FF2B5EF4-FFF2-40B4-BE49-F238E27FC236}">
+                <a16:creationId xmlns:a16="http://schemas.microsoft.com/office/drawing/2014/main" id="{9F5F9252-2CEC-66EA-7C96-5D518EAA89C4}"/>
+              </a:ext>
+            </a:extLst>
+          </p:cNvPr>
+          <p:cNvSpPr txBox="1"/>
+          <p:nvPr/>
+        </p:nvSpPr>
+        <p:spPr>
+          <a:xfrm>
+            <a:off x="10705744" y="5999967"/>
+            <a:ext cx="803425" cy="523220"/>
+          </a:xfrm>
+          <a:prstGeom prst="rect">
+            <a:avLst/>
+          </a:prstGeom>
+          <a:noFill/>
+        </p:spPr>
+        <p:txBody>
+          <a:bodyPr wrap="none" rtlCol="0">
+            <a:spAutoFit/>
+          </a:bodyPr>
+          <a:lstStyle/>
+          <a:p>
+            <a:r>
+              <a:rPr lang="en-US" sz="2800" b="1" dirty="0">
+                <a:solidFill>
+                  <a:schemeClr val="bg1"/>
+                </a:solidFill>
+              </a:rPr>
+              <a:t>end</a:t>
             </a:r>
           </a:p>
         </p:txBody>
@@ -5810,19 +5849,6 @@
             <a:noAutofit/>
           </a:bodyPr>
           <a:lstStyle/>
-          <a:p>
-            <a:pPr algn="l"/>
-            <a:r>
-              <a:rPr lang="en-US" sz="3600" dirty="0">
-                <a:solidFill>
-                  <a:schemeClr val="bg1"/>
-                </a:solidFill>
-                <a:latin typeface="Avenir Medium" panose="02000503020000020003" pitchFamily="2" charset="0"/>
-                <a:ea typeface="Bodoni Ornaments" pitchFamily="2" charset="0"/>
-              </a:rPr>
-              <a:t>CAPO @ 4th</a:t>
-            </a:r>
-          </a:p>
           <a:p>
             <a:pPr algn="l"/>
             <a:endParaRPr lang="en-US" sz="3600" dirty="0">
